--- a/assets/images/Administration_Researchers.pptx
+++ b/assets/images/Administration_Researchers.pptx
@@ -403,7 +403,7 @@
           <a:p>
             <a:fld id="{43466010-90F5-41E6-AAE8-7E580DBF8C7C}" type="datetimeFigureOut">
               <a:rPr lang="en-DK" smtClean="0"/>
-              <a:t>23/02/2026</a:t>
+              <a:t>25/02/2026</a:t>
             </a:fld>
             <a:endParaRPr lang="en-DK"/>
           </a:p>
@@ -978,7 +978,7 @@
           <a:p>
             <a:fld id="{F1465E3F-0B9F-47C9-9E08-5C827E095B3E}" type="datetimeFigureOut">
               <a:rPr lang="en-DK" smtClean="0"/>
-              <a:t>23/02/2026</a:t>
+              <a:t>25/02/2026</a:t>
             </a:fld>
             <a:endParaRPr lang="en-DK"/>
           </a:p>
@@ -1148,7 +1148,7 @@
           <a:p>
             <a:fld id="{F1465E3F-0B9F-47C9-9E08-5C827E095B3E}" type="datetimeFigureOut">
               <a:rPr lang="en-DK" smtClean="0"/>
-              <a:t>23/02/2026</a:t>
+              <a:t>25/02/2026</a:t>
             </a:fld>
             <a:endParaRPr lang="en-DK"/>
           </a:p>
@@ -1328,7 +1328,7 @@
           <a:p>
             <a:fld id="{F1465E3F-0B9F-47C9-9E08-5C827E095B3E}" type="datetimeFigureOut">
               <a:rPr lang="en-DK" smtClean="0"/>
-              <a:t>23/02/2026</a:t>
+              <a:t>25/02/2026</a:t>
             </a:fld>
             <a:endParaRPr lang="en-DK"/>
           </a:p>
@@ -1498,7 +1498,7 @@
           <a:p>
             <a:fld id="{F1465E3F-0B9F-47C9-9E08-5C827E095B3E}" type="datetimeFigureOut">
               <a:rPr lang="en-DK" smtClean="0"/>
-              <a:t>23/02/2026</a:t>
+              <a:t>25/02/2026</a:t>
             </a:fld>
             <a:endParaRPr lang="en-DK"/>
           </a:p>
@@ -1744,7 +1744,7 @@
           <a:p>
             <a:fld id="{F1465E3F-0B9F-47C9-9E08-5C827E095B3E}" type="datetimeFigureOut">
               <a:rPr lang="en-DK" smtClean="0"/>
-              <a:t>23/02/2026</a:t>
+              <a:t>25/02/2026</a:t>
             </a:fld>
             <a:endParaRPr lang="en-DK"/>
           </a:p>
@@ -1976,7 +1976,7 @@
           <a:p>
             <a:fld id="{F1465E3F-0B9F-47C9-9E08-5C827E095B3E}" type="datetimeFigureOut">
               <a:rPr lang="en-DK" smtClean="0"/>
-              <a:t>23/02/2026</a:t>
+              <a:t>25/02/2026</a:t>
             </a:fld>
             <a:endParaRPr lang="en-DK"/>
           </a:p>
@@ -2343,7 +2343,7 @@
           <a:p>
             <a:fld id="{F1465E3F-0B9F-47C9-9E08-5C827E095B3E}" type="datetimeFigureOut">
               <a:rPr lang="en-DK" smtClean="0"/>
-              <a:t>23/02/2026</a:t>
+              <a:t>25/02/2026</a:t>
             </a:fld>
             <a:endParaRPr lang="en-DK"/>
           </a:p>
@@ -2461,7 +2461,7 @@
           <a:p>
             <a:fld id="{F1465E3F-0B9F-47C9-9E08-5C827E095B3E}" type="datetimeFigureOut">
               <a:rPr lang="en-DK" smtClean="0"/>
-              <a:t>23/02/2026</a:t>
+              <a:t>25/02/2026</a:t>
             </a:fld>
             <a:endParaRPr lang="en-DK"/>
           </a:p>
@@ -2556,7 +2556,7 @@
           <a:p>
             <a:fld id="{F1465E3F-0B9F-47C9-9E08-5C827E095B3E}" type="datetimeFigureOut">
               <a:rPr lang="en-DK" smtClean="0"/>
-              <a:t>23/02/2026</a:t>
+              <a:t>25/02/2026</a:t>
             </a:fld>
             <a:endParaRPr lang="en-DK"/>
           </a:p>
@@ -2833,7 +2833,7 @@
           <a:p>
             <a:fld id="{F1465E3F-0B9F-47C9-9E08-5C827E095B3E}" type="datetimeFigureOut">
               <a:rPr lang="en-DK" smtClean="0"/>
-              <a:t>23/02/2026</a:t>
+              <a:t>25/02/2026</a:t>
             </a:fld>
             <a:endParaRPr lang="en-DK"/>
           </a:p>
@@ -3090,7 +3090,7 @@
           <a:p>
             <a:fld id="{F1465E3F-0B9F-47C9-9E08-5C827E095B3E}" type="datetimeFigureOut">
               <a:rPr lang="en-DK" smtClean="0"/>
-              <a:t>23/02/2026</a:t>
+              <a:t>25/02/2026</a:t>
             </a:fld>
             <a:endParaRPr lang="en-DK"/>
           </a:p>
@@ -3303,7 +3303,7 @@
           <a:p>
             <a:fld id="{F1465E3F-0B9F-47C9-9E08-5C827E095B3E}" type="datetimeFigureOut">
               <a:rPr lang="en-DK" smtClean="0"/>
-              <a:t>23/02/2026</a:t>
+              <a:t>25/02/2026</a:t>
             </a:fld>
             <a:endParaRPr lang="en-DK"/>
           </a:p>
@@ -3708,6 +3708,36 @@
           <a:chExt cx="0" cy="0"/>
         </a:xfrm>
       </p:grpSpPr>
+      <p:pic>
+        <p:nvPicPr>
+          <p:cNvPr id="3" name="Picture 2" descr="The image displays a table with five columns, each labeled with different roles: Researchers, ID, Administrator, Investigator, and Operator, with corresponding names under each role.&#10;&#10;AI-generated content may be incorrect.">
+            <a:extLst>
+              <a:ext uri="{FF2B5EF4-FFF2-40B4-BE49-F238E27FC236}">
+                <a16:creationId xmlns:a16="http://schemas.microsoft.com/office/drawing/2014/main" id="{64A2764C-8587-9E25-4C13-EC053494B183}"/>
+              </a:ext>
+            </a:extLst>
+          </p:cNvPr>
+          <p:cNvPicPr>
+            <a:picLocks noChangeAspect="1"/>
+          </p:cNvPicPr>
+          <p:nvPr/>
+        </p:nvPicPr>
+        <p:blipFill>
+          <a:blip r:embed="rId3"/>
+          <a:stretch>
+            <a:fillRect/>
+          </a:stretch>
+        </p:blipFill>
+        <p:spPr>
+          <a:xfrm>
+            <a:off x="7552078" y="4523208"/>
+            <a:ext cx="6496957" cy="5353797"/>
+          </a:xfrm>
+          <a:prstGeom prst="rect">
+            <a:avLst/>
+          </a:prstGeom>
+        </p:spPr>
+      </p:pic>
     </p:spTree>
     <p:extLst>
       <p:ext uri="{BB962C8B-B14F-4D97-AF65-F5344CB8AC3E}">
@@ -3738,6 +3768,36 @@
           <a:chExt cx="0" cy="0"/>
         </a:xfrm>
       </p:grpSpPr>
+      <p:pic>
+        <p:nvPicPr>
+          <p:cNvPr id="3" name="Picture 2" descr="The image displays a user interface with fields for username, password, and a selection for the role 'Investigator', along with buttons to add or cancel the entry.&#10;&#10;AI-generated content may be incorrect.">
+            <a:extLst>
+              <a:ext uri="{FF2B5EF4-FFF2-40B4-BE49-F238E27FC236}">
+                <a16:creationId xmlns:a16="http://schemas.microsoft.com/office/drawing/2014/main" id="{2C0E0735-D2B0-61A9-D772-96B1FC0AE2C0}"/>
+              </a:ext>
+            </a:extLst>
+          </p:cNvPr>
+          <p:cNvPicPr>
+            <a:picLocks noChangeAspect="1"/>
+          </p:cNvPicPr>
+          <p:nvPr/>
+        </p:nvPicPr>
+        <p:blipFill>
+          <a:blip r:embed="rId3"/>
+          <a:stretch>
+            <a:fillRect/>
+          </a:stretch>
+        </p:blipFill>
+        <p:spPr>
+          <a:xfrm>
+            <a:off x="9133449" y="6104578"/>
+            <a:ext cx="3334215" cy="2191056"/>
+          </a:xfrm>
+          <a:prstGeom prst="rect">
+            <a:avLst/>
+          </a:prstGeom>
+        </p:spPr>
+      </p:pic>
     </p:spTree>
     <p:extLst>
       <p:ext uri="{BB962C8B-B14F-4D97-AF65-F5344CB8AC3E}">
@@ -4637,6 +4697,15 @@
 </file>
 
 <file path=customXml/item2.xml><?xml version="1.0" encoding="utf-8"?>
+<?mso-contentType ?>
+<FormTemplates xmlns="http://schemas.microsoft.com/sharepoint/v3/contenttype/forms">
+  <Display>DocumentLibraryForm</Display>
+  <Edit>DocumentLibraryForm</Edit>
+  <New>DocumentLibraryForm</New>
+</FormTemplates>
+</file>
+
+<file path=customXml/item3.xml><?xml version="1.0" encoding="utf-8"?>
 <p:properties xmlns:p="http://schemas.microsoft.com/office/2006/metadata/properties" xmlns:xsi="http://www.w3.org/2001/XMLSchema-instance" xmlns:pc="http://schemas.microsoft.com/office/infopath/2007/PartnerControls">
   <documentManagement>
     <TaxCatchAll xmlns="6dfb7b4b-871d-4c24-9d42-16b14ecd044c" xsi:nil="true"/>
@@ -4645,15 +4714,6 @@
     </lcf76f155ced4ddcb4097134ff3c332f>
   </documentManagement>
 </p:properties>
-</file>
-
-<file path=customXml/item3.xml><?xml version="1.0" encoding="utf-8"?>
-<?mso-contentType ?>
-<FormTemplates xmlns="http://schemas.microsoft.com/sharepoint/v3/contenttype/forms">
-  <Display>DocumentLibraryForm</Display>
-  <Edit>DocumentLibraryForm</Edit>
-  <New>DocumentLibraryForm</New>
-</FormTemplates>
 </file>
 
 <file path=customXml/itemProps1.xml><?xml version="1.0" encoding="utf-8"?>
@@ -4676,6 +4736,14 @@
 </file>
 
 <file path=customXml/itemProps2.xml><?xml version="1.0" encoding="utf-8"?>
+<ds:datastoreItem xmlns:ds="http://schemas.openxmlformats.org/officeDocument/2006/customXml" ds:itemID="{EF875D47-8106-485E-98E0-D60C6A98DA6A}">
+  <ds:schemaRefs>
+    <ds:schemaRef ds:uri="http://schemas.microsoft.com/sharepoint/v3/contenttype/forms"/>
+  </ds:schemaRefs>
+</ds:datastoreItem>
+</file>
+
+<file path=customXml/itemProps3.xml><?xml version="1.0" encoding="utf-8"?>
 <ds:datastoreItem xmlns:ds="http://schemas.openxmlformats.org/officeDocument/2006/customXml" ds:itemID="{2EF670CE-B0AA-4D52-AFC6-AA4BF7D46EEA}">
   <ds:schemaRefs>
     <ds:schemaRef ds:uri="http://schemas.microsoft.com/office/2006/metadata/properties"/>
@@ -4684,12 +4752,4 @@
     <ds:schemaRef ds:uri="51c7d8ad-74c8-4833-8478-0d0a5cafce0c"/>
   </ds:schemaRefs>
 </ds:datastoreItem>
-</file>
-
-<file path=customXml/itemProps3.xml><?xml version="1.0" encoding="utf-8"?>
-<ds:datastoreItem xmlns:ds="http://schemas.openxmlformats.org/officeDocument/2006/customXml" ds:itemID="{EF875D47-8106-485E-98E0-D60C6A98DA6A}">
-  <ds:schemaRefs>
-    <ds:schemaRef ds:uri="http://schemas.microsoft.com/sharepoint/v3/contenttype/forms"/>
-  </ds:schemaRefs>
-</ds:datastoreItem>
 </file>
--- a/assets/images/Administration_Researchers.pptx
+++ b/assets/images/Administration_Researchers.pptx
@@ -3731,13 +3731,412 @@
         <p:spPr>
           <a:xfrm>
             <a:off x="7552078" y="4523208"/>
-            <a:ext cx="6496957" cy="5353797"/>
+            <a:ext cx="5400000" cy="4449853"/>
           </a:xfrm>
           <a:prstGeom prst="rect">
             <a:avLst/>
           </a:prstGeom>
         </p:spPr>
       </p:pic>
+      <p:sp>
+        <p:nvSpPr>
+          <p:cNvPr id="2" name="Oval 1">
+            <a:extLst>
+              <a:ext uri="{FF2B5EF4-FFF2-40B4-BE49-F238E27FC236}">
+                <a16:creationId xmlns:a16="http://schemas.microsoft.com/office/drawing/2014/main" id="{4A773856-B625-8512-1F5D-870E27EC25A0}"/>
+              </a:ext>
+            </a:extLst>
+          </p:cNvPr>
+          <p:cNvSpPr/>
+          <p:nvPr/>
+        </p:nvSpPr>
+        <p:spPr>
+          <a:xfrm>
+            <a:off x="12534715" y="4791456"/>
+            <a:ext cx="324000" cy="324000"/>
+          </a:xfrm>
+          <a:prstGeom prst="ellipse">
+            <a:avLst/>
+          </a:prstGeom>
+          <a:noFill/>
+          <a:ln>
+            <a:solidFill>
+              <a:srgbClr val="FF0000"/>
+            </a:solidFill>
+          </a:ln>
+        </p:spPr>
+        <p:style>
+          <a:lnRef idx="2">
+            <a:schemeClr val="accent1">
+              <a:shade val="15000"/>
+            </a:schemeClr>
+          </a:lnRef>
+          <a:fillRef idx="1">
+            <a:schemeClr val="accent1"/>
+          </a:fillRef>
+          <a:effectRef idx="0">
+            <a:schemeClr val="accent1"/>
+          </a:effectRef>
+          <a:fontRef idx="minor">
+            <a:schemeClr val="lt1"/>
+          </a:fontRef>
+        </p:style>
+        <p:txBody>
+          <a:bodyPr rtlCol="0" anchor="ctr"/>
+          <a:lstStyle/>
+          <a:p>
+            <a:pPr algn="ctr"/>
+            <a:endParaRPr lang="en-DK"/>
+          </a:p>
+        </p:txBody>
+      </p:sp>
+      <p:sp>
+        <p:nvSpPr>
+          <p:cNvPr id="4" name="Rectangle: Rounded Corners 3">
+            <a:extLst>
+              <a:ext uri="{FF2B5EF4-FFF2-40B4-BE49-F238E27FC236}">
+                <a16:creationId xmlns:a16="http://schemas.microsoft.com/office/drawing/2014/main" id="{DF44F6E6-21FC-F01E-99AC-126CE037B367}"/>
+              </a:ext>
+            </a:extLst>
+          </p:cNvPr>
+          <p:cNvSpPr/>
+          <p:nvPr/>
+        </p:nvSpPr>
+        <p:spPr>
+          <a:xfrm>
+            <a:off x="11855450" y="5314950"/>
+            <a:ext cx="469900" cy="304800"/>
+          </a:xfrm>
+          <a:prstGeom prst="roundRect">
+            <a:avLst/>
+          </a:prstGeom>
+          <a:noFill/>
+          <a:ln>
+            <a:solidFill>
+              <a:srgbClr val="FF0000"/>
+            </a:solidFill>
+          </a:ln>
+        </p:spPr>
+        <p:style>
+          <a:lnRef idx="2">
+            <a:schemeClr val="accent1">
+              <a:shade val="15000"/>
+            </a:schemeClr>
+          </a:lnRef>
+          <a:fillRef idx="1">
+            <a:schemeClr val="accent1"/>
+          </a:fillRef>
+          <a:effectRef idx="0">
+            <a:schemeClr val="accent1"/>
+          </a:effectRef>
+          <a:fontRef idx="minor">
+            <a:schemeClr val="lt1"/>
+          </a:fontRef>
+        </p:style>
+        <p:txBody>
+          <a:bodyPr rtlCol="0" anchor="ctr"/>
+          <a:lstStyle/>
+          <a:p>
+            <a:pPr algn="ctr"/>
+            <a:endParaRPr lang="en-DK"/>
+          </a:p>
+        </p:txBody>
+      </p:sp>
+      <p:sp>
+        <p:nvSpPr>
+          <p:cNvPr id="5" name="Rectangle: Rounded Corners 4">
+            <a:extLst>
+              <a:ext uri="{FF2B5EF4-FFF2-40B4-BE49-F238E27FC236}">
+                <a16:creationId xmlns:a16="http://schemas.microsoft.com/office/drawing/2014/main" id="{C5A31372-C553-F36F-53B3-114A441F6C89}"/>
+              </a:ext>
+            </a:extLst>
+          </p:cNvPr>
+          <p:cNvSpPr/>
+          <p:nvPr/>
+        </p:nvSpPr>
+        <p:spPr>
+          <a:xfrm>
+            <a:off x="12350715" y="5803900"/>
+            <a:ext cx="469900" cy="304800"/>
+          </a:xfrm>
+          <a:prstGeom prst="roundRect">
+            <a:avLst/>
+          </a:prstGeom>
+          <a:noFill/>
+          <a:ln>
+            <a:solidFill>
+              <a:srgbClr val="FF0000"/>
+            </a:solidFill>
+          </a:ln>
+        </p:spPr>
+        <p:style>
+          <a:lnRef idx="2">
+            <a:schemeClr val="accent1">
+              <a:shade val="15000"/>
+            </a:schemeClr>
+          </a:lnRef>
+          <a:fillRef idx="1">
+            <a:schemeClr val="accent1"/>
+          </a:fillRef>
+          <a:effectRef idx="0">
+            <a:schemeClr val="accent1"/>
+          </a:effectRef>
+          <a:fontRef idx="minor">
+            <a:schemeClr val="lt1"/>
+          </a:fontRef>
+        </p:style>
+        <p:txBody>
+          <a:bodyPr rtlCol="0" anchor="ctr"/>
+          <a:lstStyle/>
+          <a:p>
+            <a:pPr algn="ctr"/>
+            <a:endParaRPr lang="en-DK"/>
+          </a:p>
+        </p:txBody>
+      </p:sp>
+      <p:sp>
+        <p:nvSpPr>
+          <p:cNvPr id="6" name="TextBox 5">
+            <a:extLst>
+              <a:ext uri="{FF2B5EF4-FFF2-40B4-BE49-F238E27FC236}">
+                <a16:creationId xmlns:a16="http://schemas.microsoft.com/office/drawing/2014/main" id="{DCAA78A4-4EE6-1D01-8B1A-8911CA32E606}"/>
+              </a:ext>
+            </a:extLst>
+          </p:cNvPr>
+          <p:cNvSpPr txBox="1"/>
+          <p:nvPr/>
+        </p:nvSpPr>
+        <p:spPr>
+          <a:xfrm>
+            <a:off x="13201650" y="5771634"/>
+            <a:ext cx="1962973" cy="369332"/>
+          </a:xfrm>
+          <a:prstGeom prst="rect">
+            <a:avLst/>
+          </a:prstGeom>
+          <a:noFill/>
+        </p:spPr>
+        <p:txBody>
+          <a:bodyPr wrap="none" rtlCol="0">
+            <a:spAutoFit/>
+          </a:bodyPr>
+          <a:lstStyle/>
+          <a:p>
+            <a:r>
+              <a:rPr lang="en-US" dirty="0"/>
+              <a:t>Delete researcher</a:t>
+            </a:r>
+            <a:endParaRPr lang="en-DK" dirty="0"/>
+          </a:p>
+        </p:txBody>
+      </p:sp>
+      <p:sp>
+        <p:nvSpPr>
+          <p:cNvPr id="7" name="TextBox 6">
+            <a:extLst>
+              <a:ext uri="{FF2B5EF4-FFF2-40B4-BE49-F238E27FC236}">
+                <a16:creationId xmlns:a16="http://schemas.microsoft.com/office/drawing/2014/main" id="{27425BA7-2221-E4CC-B3F0-BF6E302B56B7}"/>
+              </a:ext>
+            </a:extLst>
+          </p:cNvPr>
+          <p:cNvSpPr txBox="1"/>
+          <p:nvPr/>
+        </p:nvSpPr>
+        <p:spPr>
+          <a:xfrm>
+            <a:off x="13201650" y="5282684"/>
+            <a:ext cx="1970155" cy="369332"/>
+          </a:xfrm>
+          <a:prstGeom prst="rect">
+            <a:avLst/>
+          </a:prstGeom>
+          <a:noFill/>
+        </p:spPr>
+        <p:txBody>
+          <a:bodyPr wrap="none" rtlCol="0">
+            <a:spAutoFit/>
+          </a:bodyPr>
+          <a:lstStyle/>
+          <a:p>
+            <a:r>
+              <a:rPr lang="en-US" dirty="0"/>
+              <a:t>Change password</a:t>
+            </a:r>
+            <a:endParaRPr lang="en-DK" dirty="0"/>
+          </a:p>
+        </p:txBody>
+      </p:sp>
+      <p:sp>
+        <p:nvSpPr>
+          <p:cNvPr id="8" name="TextBox 7">
+            <a:extLst>
+              <a:ext uri="{FF2B5EF4-FFF2-40B4-BE49-F238E27FC236}">
+                <a16:creationId xmlns:a16="http://schemas.microsoft.com/office/drawing/2014/main" id="{2199ADE9-D23E-1C43-86BA-1DBBBDF10729}"/>
+              </a:ext>
+            </a:extLst>
+          </p:cNvPr>
+          <p:cNvSpPr txBox="1"/>
+          <p:nvPr/>
+        </p:nvSpPr>
+        <p:spPr>
+          <a:xfrm>
+            <a:off x="13227956" y="4768790"/>
+            <a:ext cx="1701235" cy="369332"/>
+          </a:xfrm>
+          <a:prstGeom prst="rect">
+            <a:avLst/>
+          </a:prstGeom>
+          <a:noFill/>
+        </p:spPr>
+        <p:txBody>
+          <a:bodyPr wrap="none" rtlCol="0">
+            <a:spAutoFit/>
+          </a:bodyPr>
+          <a:lstStyle/>
+          <a:p>
+            <a:r>
+              <a:rPr lang="en-US" dirty="0"/>
+              <a:t>Add researcher</a:t>
+            </a:r>
+            <a:endParaRPr lang="en-DK" dirty="0"/>
+          </a:p>
+        </p:txBody>
+      </p:sp>
+      <p:cxnSp>
+        <p:nvCxnSpPr>
+          <p:cNvPr id="10" name="Straight Arrow Connector 9">
+            <a:extLst>
+              <a:ext uri="{FF2B5EF4-FFF2-40B4-BE49-F238E27FC236}">
+                <a16:creationId xmlns:a16="http://schemas.microsoft.com/office/drawing/2014/main" id="{00AFC4A4-5C0E-B11B-6239-C40AD71E4AC3}"/>
+              </a:ext>
+            </a:extLst>
+          </p:cNvPr>
+          <p:cNvCxnSpPr>
+            <a:stCxn id="8" idx="1"/>
+          </p:cNvCxnSpPr>
+          <p:nvPr/>
+        </p:nvCxnSpPr>
+        <p:spPr>
+          <a:xfrm flipH="1">
+            <a:off x="12858715" y="4953456"/>
+            <a:ext cx="369241" cy="0"/>
+          </a:xfrm>
+          <a:prstGeom prst="straightConnector1">
+            <a:avLst/>
+          </a:prstGeom>
+          <a:ln w="28575">
+            <a:solidFill>
+              <a:srgbClr val="FF0000"/>
+            </a:solidFill>
+            <a:tailEnd type="triangle"/>
+          </a:ln>
+        </p:spPr>
+        <p:style>
+          <a:lnRef idx="2">
+            <a:schemeClr val="accent1"/>
+          </a:lnRef>
+          <a:fillRef idx="0">
+            <a:schemeClr val="accent1"/>
+          </a:fillRef>
+          <a:effectRef idx="1">
+            <a:schemeClr val="accent1"/>
+          </a:effectRef>
+          <a:fontRef idx="minor">
+            <a:schemeClr val="tx1"/>
+          </a:fontRef>
+        </p:style>
+      </p:cxnSp>
+      <p:cxnSp>
+        <p:nvCxnSpPr>
+          <p:cNvPr id="11" name="Straight Arrow Connector 10">
+            <a:extLst>
+              <a:ext uri="{FF2B5EF4-FFF2-40B4-BE49-F238E27FC236}">
+                <a16:creationId xmlns:a16="http://schemas.microsoft.com/office/drawing/2014/main" id="{37D161A2-1276-7419-15FD-835CD418BB16}"/>
+              </a:ext>
+            </a:extLst>
+          </p:cNvPr>
+          <p:cNvCxnSpPr>
+            <a:cxnSpLocks/>
+            <a:stCxn id="7" idx="1"/>
+          </p:cNvCxnSpPr>
+          <p:nvPr/>
+        </p:nvCxnSpPr>
+        <p:spPr>
+          <a:xfrm flipH="1">
+            <a:off x="12333729" y="5467350"/>
+            <a:ext cx="867921" cy="0"/>
+          </a:xfrm>
+          <a:prstGeom prst="straightConnector1">
+            <a:avLst/>
+          </a:prstGeom>
+          <a:ln w="28575">
+            <a:solidFill>
+              <a:srgbClr val="FF0000"/>
+            </a:solidFill>
+            <a:tailEnd type="triangle"/>
+          </a:ln>
+        </p:spPr>
+        <p:style>
+          <a:lnRef idx="2">
+            <a:schemeClr val="accent1"/>
+          </a:lnRef>
+          <a:fillRef idx="0">
+            <a:schemeClr val="accent1"/>
+          </a:fillRef>
+          <a:effectRef idx="1">
+            <a:schemeClr val="accent1"/>
+          </a:effectRef>
+          <a:fontRef idx="minor">
+            <a:schemeClr val="tx1"/>
+          </a:fontRef>
+        </p:style>
+      </p:cxnSp>
+      <p:cxnSp>
+        <p:nvCxnSpPr>
+          <p:cNvPr id="12" name="Straight Arrow Connector 11">
+            <a:extLst>
+              <a:ext uri="{FF2B5EF4-FFF2-40B4-BE49-F238E27FC236}">
+                <a16:creationId xmlns:a16="http://schemas.microsoft.com/office/drawing/2014/main" id="{85CB2B6B-E398-F29C-D81D-5C7C7A373B5A}"/>
+              </a:ext>
+            </a:extLst>
+          </p:cNvPr>
+          <p:cNvCxnSpPr>
+            <a:cxnSpLocks/>
+            <a:stCxn id="6" idx="1"/>
+            <a:endCxn id="5" idx="3"/>
+          </p:cNvCxnSpPr>
+          <p:nvPr/>
+        </p:nvCxnSpPr>
+        <p:spPr>
+          <a:xfrm flipH="1">
+            <a:off x="12820615" y="5956300"/>
+            <a:ext cx="381035" cy="0"/>
+          </a:xfrm>
+          <a:prstGeom prst="straightConnector1">
+            <a:avLst/>
+          </a:prstGeom>
+          <a:ln w="28575">
+            <a:solidFill>
+              <a:srgbClr val="FF0000"/>
+            </a:solidFill>
+            <a:tailEnd type="triangle"/>
+          </a:ln>
+        </p:spPr>
+        <p:style>
+          <a:lnRef idx="2">
+            <a:schemeClr val="accent1"/>
+          </a:lnRef>
+          <a:fillRef idx="0">
+            <a:schemeClr val="accent1"/>
+          </a:fillRef>
+          <a:effectRef idx="1">
+            <a:schemeClr val="accent1"/>
+          </a:effectRef>
+          <a:fontRef idx="minor">
+            <a:schemeClr val="tx1"/>
+          </a:fontRef>
+        </p:style>
+      </p:cxnSp>
     </p:spTree>
     <p:extLst>
       <p:ext uri="{BB962C8B-B14F-4D97-AF65-F5344CB8AC3E}">
@@ -4746,10 +5145,16 @@
 <file path=customXml/itemProps3.xml><?xml version="1.0" encoding="utf-8"?>
 <ds:datastoreItem xmlns:ds="http://schemas.openxmlformats.org/officeDocument/2006/customXml" ds:itemID="{2EF670CE-B0AA-4D52-AFC6-AA4BF7D46EEA}">
   <ds:schemaRefs>
+    <ds:schemaRef ds:uri="http://purl.org/dc/elements/1.1/"/>
     <ds:schemaRef ds:uri="http://schemas.microsoft.com/office/2006/metadata/properties"/>
+    <ds:schemaRef ds:uri="http://schemas.microsoft.com/office/2006/documentManagement/types"/>
+    <ds:schemaRef ds:uri="http://purl.org/dc/dcmitype/"/>
+    <ds:schemaRef ds:uri="51c7d8ad-74c8-4833-8478-0d0a5cafce0c"/>
+    <ds:schemaRef ds:uri="6dfb7b4b-871d-4c24-9d42-16b14ecd044c"/>
+    <ds:schemaRef ds:uri="http://www.w3.org/XML/1998/namespace"/>
+    <ds:schemaRef ds:uri="http://purl.org/dc/terms/"/>
     <ds:schemaRef ds:uri="http://schemas.microsoft.com/office/infopath/2007/PartnerControls"/>
-    <ds:schemaRef ds:uri="6dfb7b4b-871d-4c24-9d42-16b14ecd044c"/>
-    <ds:schemaRef ds:uri="51c7d8ad-74c8-4833-8478-0d0a5cafce0c"/>
+    <ds:schemaRef ds:uri="http://schemas.openxmlformats.org/package/2006/metadata/core-properties"/>
   </ds:schemaRefs>
 </ds:datastoreItem>
 </file>